--- a/memo/オブジェクトが動く.pptx
+++ b/memo/オブジェクトが動く.pptx
@@ -5,10 +5,11 @@
     <p:sldMasterId id="2147483648" r:id="rId1"/>
   </p:sldMasterIdLst>
   <p:notesMasterIdLst>
-    <p:notesMasterId r:id="rId3"/>
+    <p:notesMasterId r:id="rId4"/>
   </p:notesMasterIdLst>
   <p:sldIdLst>
     <p:sldId id="256" r:id="rId2"/>
+    <p:sldId id="257" r:id="rId3"/>
   </p:sldIdLst>
   <p:sldSz cx="12192000" cy="6858000"/>
   <p:notesSz cx="6858000" cy="9144000"/>
@@ -107,7 +108,112 @@
       </a:defRPr>
     </a:lvl9pPr>
   </p:defaultTextStyle>
+  <p:extLst>
+    <p:ext uri="{EFAFB233-063F-42B5-8137-9DF3F51BA10A}">
+      <p15:sldGuideLst xmlns:p15="http://schemas.microsoft.com/office/powerpoint/2012/main"/>
+    </p:ext>
+  </p:extLst>
 </p:presentation>
+</file>
+
+<file path=ppt/changesInfos/changesInfo1.xml><?xml version="1.0" encoding="utf-8"?>
+<pc:chgInfo xmlns:a="http://schemas.openxmlformats.org/drawingml/2006/main" xmlns:r="http://schemas.openxmlformats.org/officeDocument/2006/relationships" xmlns:ac="http://schemas.microsoft.com/office/drawing/2013/main/command" xmlns:pc="http://schemas.microsoft.com/office/powerpoint/2013/main/command">
+  <pc:docChgLst>
+    <pc:chgData name="越智 統" userId="2de33d77-a65a-42d1-92e2-b40da65bb07e" providerId="ADAL" clId="{00156A21-8276-4F64-9608-8C1FADA4CD25}"/>
+    <pc:docChg chg="undo custSel addSld modSld">
+      <pc:chgData name="越智 統" userId="2de33d77-a65a-42d1-92e2-b40da65bb07e" providerId="ADAL" clId="{00156A21-8276-4F64-9608-8C1FADA4CD25}" dt="2026-03-13T04:20:37.543" v="226" actId="1076"/>
+      <pc:docMkLst>
+        <pc:docMk/>
+      </pc:docMkLst>
+      <pc:sldChg chg="modSp mod">
+        <pc:chgData name="越智 統" userId="2de33d77-a65a-42d1-92e2-b40da65bb07e" providerId="ADAL" clId="{00156A21-8276-4F64-9608-8C1FADA4CD25}" dt="2026-03-13T04:17:50.444" v="67" actId="20577"/>
+        <pc:sldMkLst>
+          <pc:docMk/>
+          <pc:sldMk cId="3698264915" sldId="256"/>
+        </pc:sldMkLst>
+        <pc:spChg chg="mod">
+          <ac:chgData name="越智 統" userId="2de33d77-a65a-42d1-92e2-b40da65bb07e" providerId="ADAL" clId="{00156A21-8276-4F64-9608-8C1FADA4CD25}" dt="2026-03-13T04:17:50.444" v="67" actId="20577"/>
+          <ac:spMkLst>
+            <pc:docMk/>
+            <pc:sldMk cId="3698264915" sldId="256"/>
+            <ac:spMk id="11" creationId="{DE3189D3-7BFD-5D37-F07F-879E06B739DB}"/>
+          </ac:spMkLst>
+        </pc:spChg>
+        <pc:spChg chg="mod">
+          <ac:chgData name="越智 統" userId="2de33d77-a65a-42d1-92e2-b40da65bb07e" providerId="ADAL" clId="{00156A21-8276-4F64-9608-8C1FADA4CD25}" dt="2026-03-13T04:17:23.364" v="54" actId="20577"/>
+          <ac:spMkLst>
+            <pc:docMk/>
+            <pc:sldMk cId="3698264915" sldId="256"/>
+            <ac:spMk id="12" creationId="{6CA2DB1D-3C7E-8BA3-C58D-55E7C11D0AB0}"/>
+          </ac:spMkLst>
+        </pc:spChg>
+        <pc:spChg chg="mod">
+          <ac:chgData name="越智 統" userId="2de33d77-a65a-42d1-92e2-b40da65bb07e" providerId="ADAL" clId="{00156A21-8276-4F64-9608-8C1FADA4CD25}" dt="2026-03-13T04:17:25.405" v="58" actId="20577"/>
+          <ac:spMkLst>
+            <pc:docMk/>
+            <pc:sldMk cId="3698264915" sldId="256"/>
+            <ac:spMk id="14" creationId="{457A1AF4-6D1E-0D5A-D547-4413FE1536F3}"/>
+          </ac:spMkLst>
+        </pc:spChg>
+      </pc:sldChg>
+      <pc:sldChg chg="modSp add mod">
+        <pc:chgData name="越智 統" userId="2de33d77-a65a-42d1-92e2-b40da65bb07e" providerId="ADAL" clId="{00156A21-8276-4F64-9608-8C1FADA4CD25}" dt="2026-03-13T04:20:37.543" v="226" actId="1076"/>
+        <pc:sldMkLst>
+          <pc:docMk/>
+          <pc:sldMk cId="360896339" sldId="257"/>
+        </pc:sldMkLst>
+        <pc:spChg chg="mod">
+          <ac:chgData name="越智 統" userId="2de33d77-a65a-42d1-92e2-b40da65bb07e" providerId="ADAL" clId="{00156A21-8276-4F64-9608-8C1FADA4CD25}" dt="2026-03-13T04:18:07.979" v="83" actId="20577"/>
+          <ac:spMkLst>
+            <pc:docMk/>
+            <pc:sldMk cId="360896339" sldId="257"/>
+            <ac:spMk id="11" creationId="{58C5102E-DFF7-1D48-182A-8B255B53A437}"/>
+          </ac:spMkLst>
+        </pc:spChg>
+        <pc:spChg chg="mod">
+          <ac:chgData name="越智 統" userId="2de33d77-a65a-42d1-92e2-b40da65bb07e" providerId="ADAL" clId="{00156A21-8276-4F64-9608-8C1FADA4CD25}" dt="2026-03-13T04:20:37.543" v="226" actId="1076"/>
+          <ac:spMkLst>
+            <pc:docMk/>
+            <pc:sldMk cId="360896339" sldId="257"/>
+            <ac:spMk id="12" creationId="{F5269400-24F2-FF54-5FF9-F3898F9A9427}"/>
+          </ac:spMkLst>
+        </pc:spChg>
+        <pc:spChg chg="mod">
+          <ac:chgData name="越智 統" userId="2de33d77-a65a-42d1-92e2-b40da65bb07e" providerId="ADAL" clId="{00156A21-8276-4F64-9608-8C1FADA4CD25}" dt="2026-03-13T04:19:42.769" v="203" actId="20577"/>
+          <ac:spMkLst>
+            <pc:docMk/>
+            <pc:sldMk cId="360896339" sldId="257"/>
+            <ac:spMk id="13" creationId="{DC515835-AC3C-619C-C4E9-792AA76E6AE9}"/>
+          </ac:spMkLst>
+        </pc:spChg>
+        <pc:spChg chg="mod">
+          <ac:chgData name="越智 統" userId="2de33d77-a65a-42d1-92e2-b40da65bb07e" providerId="ADAL" clId="{00156A21-8276-4F64-9608-8C1FADA4CD25}" dt="2026-03-13T04:18:13.441" v="87" actId="20577"/>
+          <ac:spMkLst>
+            <pc:docMk/>
+            <pc:sldMk cId="360896339" sldId="257"/>
+            <ac:spMk id="14" creationId="{59E4B49D-F8C7-A240-877A-6186304D9969}"/>
+          </ac:spMkLst>
+        </pc:spChg>
+        <pc:spChg chg="mod">
+          <ac:chgData name="越智 統" userId="2de33d77-a65a-42d1-92e2-b40da65bb07e" providerId="ADAL" clId="{00156A21-8276-4F64-9608-8C1FADA4CD25}" dt="2026-03-13T04:19:32.402" v="199" actId="20577"/>
+          <ac:spMkLst>
+            <pc:docMk/>
+            <pc:sldMk cId="360896339" sldId="257"/>
+            <ac:spMk id="15" creationId="{6026282E-2BB9-61AC-F561-2FBB1462C1FA}"/>
+          </ac:spMkLst>
+        </pc:spChg>
+        <pc:spChg chg="mod">
+          <ac:chgData name="越智 統" userId="2de33d77-a65a-42d1-92e2-b40da65bb07e" providerId="ADAL" clId="{00156A21-8276-4F64-9608-8C1FADA4CD25}" dt="2026-03-13T04:20:27.946" v="225" actId="1076"/>
+          <ac:spMkLst>
+            <pc:docMk/>
+            <pc:sldMk cId="360896339" sldId="257"/>
+            <ac:spMk id="16" creationId="{35BE5446-70B1-8E53-0444-176CA8C66623}"/>
+          </ac:spMkLst>
+        </pc:spChg>
+      </pc:sldChg>
+    </pc:docChg>
+  </pc:docChgLst>
+</pc:chgInfo>
 </file>
 
 <file path=ppt/notesMasters/notesMaster1.xml><?xml version="1.0" encoding="utf-8"?>
@@ -192,7 +298,7 @@
           <a:p>
             <a:fld id="{DA9C4C5A-1F8C-4C7C-9AFC-380797C29894}" type="datetimeFigureOut">
               <a:rPr kumimoji="1" lang="ja-JP" altLang="en-US" smtClean="0"/>
-              <a:t>2026/3/8</a:t>
+              <a:t>2026/3/13</a:t>
             </a:fld>
             <a:endParaRPr kumimoji="1" lang="ja-JP" altLang="en-US"/>
           </a:p>
@@ -575,6 +681,114 @@
 </p:notes>
 </file>
 
+<file path=ppt/notesSlides/notesSlide2.xml><?xml version="1.0" encoding="utf-8"?>
+<p:notes xmlns:a="http://schemas.openxmlformats.org/drawingml/2006/main" xmlns:r="http://schemas.openxmlformats.org/officeDocument/2006/relationships" xmlns:p="http://schemas.openxmlformats.org/presentationml/2006/main">
+  <p:cSld>
+    <p:spTree>
+      <p:nvGrpSpPr>
+        <p:cNvPr id="1" name="">
+          <a:extLst>
+            <a:ext uri="{FF2B5EF4-FFF2-40B4-BE49-F238E27FC236}">
+              <a16:creationId xmlns:a16="http://schemas.microsoft.com/office/drawing/2014/main" id="{D0A4B9C2-E309-00DE-EBCE-7A657D42C35A}"/>
+            </a:ext>
+          </a:extLst>
+        </p:cNvPr>
+        <p:cNvGrpSpPr/>
+        <p:nvPr/>
+      </p:nvGrpSpPr>
+      <p:grpSpPr>
+        <a:xfrm>
+          <a:off x="0" y="0"/>
+          <a:ext cx="0" cy="0"/>
+          <a:chOff x="0" y="0"/>
+          <a:chExt cx="0" cy="0"/>
+        </a:xfrm>
+      </p:grpSpPr>
+      <p:sp>
+        <p:nvSpPr>
+          <p:cNvPr id="2" name="スライド イメージ プレースホルダー 1">
+            <a:extLst>
+              <a:ext uri="{FF2B5EF4-FFF2-40B4-BE49-F238E27FC236}">
+                <a16:creationId xmlns:a16="http://schemas.microsoft.com/office/drawing/2014/main" id="{A04917A9-0CAE-23E0-53D4-73B2E3EDEF90}"/>
+              </a:ext>
+            </a:extLst>
+          </p:cNvPr>
+          <p:cNvSpPr>
+            <a:spLocks noGrp="1" noRot="1" noChangeAspect="1"/>
+          </p:cNvSpPr>
+          <p:nvPr>
+            <p:ph type="sldImg"/>
+          </p:nvPr>
+        </p:nvSpPr>
+        <p:spPr/>
+      </p:sp>
+      <p:sp>
+        <p:nvSpPr>
+          <p:cNvPr id="3" name="ノート プレースホルダー 2">
+            <a:extLst>
+              <a:ext uri="{FF2B5EF4-FFF2-40B4-BE49-F238E27FC236}">
+                <a16:creationId xmlns:a16="http://schemas.microsoft.com/office/drawing/2014/main" id="{AC042036-E522-C095-A625-E651B0E41ACE}"/>
+              </a:ext>
+            </a:extLst>
+          </p:cNvPr>
+          <p:cNvSpPr>
+            <a:spLocks noGrp="1"/>
+          </p:cNvSpPr>
+          <p:nvPr>
+            <p:ph type="body" idx="1"/>
+          </p:nvPr>
+        </p:nvSpPr>
+        <p:spPr/>
+        <p:txBody>
+          <a:bodyPr/>
+          <a:lstStyle/>
+          <a:p>
+            <a:endParaRPr kumimoji="1" lang="ja-JP" altLang="en-US" dirty="0"/>
+          </a:p>
+        </p:txBody>
+      </p:sp>
+      <p:sp>
+        <p:nvSpPr>
+          <p:cNvPr id="4" name="スライド番号プレースホルダー 3">
+            <a:extLst>
+              <a:ext uri="{FF2B5EF4-FFF2-40B4-BE49-F238E27FC236}">
+                <a16:creationId xmlns:a16="http://schemas.microsoft.com/office/drawing/2014/main" id="{5312B0EB-F038-B373-60B8-65CA6C36F7E4}"/>
+              </a:ext>
+            </a:extLst>
+          </p:cNvPr>
+          <p:cNvSpPr>
+            <a:spLocks noGrp="1"/>
+          </p:cNvSpPr>
+          <p:nvPr>
+            <p:ph type="sldNum" sz="quarter" idx="5"/>
+          </p:nvPr>
+        </p:nvSpPr>
+        <p:spPr/>
+        <p:txBody>
+          <a:bodyPr/>
+          <a:lstStyle/>
+          <a:p>
+            <a:fld id="{E3250B6B-1A29-4028-9D9F-02BB49CE4107}" type="slidenum">
+              <a:rPr kumimoji="1" lang="ja-JP" altLang="en-US" smtClean="0"/>
+              <a:t>2</a:t>
+            </a:fld>
+            <a:endParaRPr kumimoji="1" lang="ja-JP" altLang="en-US"/>
+          </a:p>
+        </p:txBody>
+      </p:sp>
+    </p:spTree>
+    <p:extLst>
+      <p:ext uri="{BB962C8B-B14F-4D97-AF65-F5344CB8AC3E}">
+        <p14:creationId xmlns:p14="http://schemas.microsoft.com/office/powerpoint/2010/main" val="2902379987"/>
+      </p:ext>
+    </p:extLst>
+  </p:cSld>
+  <p:clrMapOvr>
+    <a:masterClrMapping/>
+  </p:clrMapOvr>
+</p:notes>
+</file>
+
 <file path=ppt/slideLayouts/slideLayout1.xml><?xml version="1.0" encoding="utf-8"?>
 <p:sldLayout xmlns:a="http://schemas.openxmlformats.org/drawingml/2006/main" xmlns:r="http://schemas.openxmlformats.org/officeDocument/2006/relationships" xmlns:p="http://schemas.openxmlformats.org/presentationml/2006/main" type="title" preserve="1">
   <p:cSld name="タイトル スライド">
@@ -722,7 +936,7 @@
           <a:p>
             <a:fld id="{646F7BC6-0DD9-432D-832E-B572781F5BB3}" type="datetimeFigureOut">
               <a:rPr kumimoji="1" lang="ja-JP" altLang="en-US" smtClean="0"/>
-              <a:t>2026/3/8</a:t>
+              <a:t>2026/3/13</a:t>
             </a:fld>
             <a:endParaRPr kumimoji="1" lang="ja-JP" altLang="en-US"/>
           </a:p>
@@ -952,7 +1166,7 @@
           <a:p>
             <a:fld id="{646F7BC6-0DD9-432D-832E-B572781F5BB3}" type="datetimeFigureOut">
               <a:rPr kumimoji="1" lang="ja-JP" altLang="en-US" smtClean="0"/>
-              <a:t>2026/3/8</a:t>
+              <a:t>2026/3/13</a:t>
             </a:fld>
             <a:endParaRPr kumimoji="1" lang="ja-JP" altLang="en-US"/>
           </a:p>
@@ -1192,7 +1406,7 @@
           <a:p>
             <a:fld id="{646F7BC6-0DD9-432D-832E-B572781F5BB3}" type="datetimeFigureOut">
               <a:rPr kumimoji="1" lang="ja-JP" altLang="en-US" smtClean="0"/>
-              <a:t>2026/3/8</a:t>
+              <a:t>2026/3/13</a:t>
             </a:fld>
             <a:endParaRPr kumimoji="1" lang="ja-JP" altLang="en-US"/>
           </a:p>
@@ -1422,7 +1636,7 @@
           <a:p>
             <a:fld id="{646F7BC6-0DD9-432D-832E-B572781F5BB3}" type="datetimeFigureOut">
               <a:rPr kumimoji="1" lang="ja-JP" altLang="en-US" smtClean="0"/>
-              <a:t>2026/3/8</a:t>
+              <a:t>2026/3/13</a:t>
             </a:fld>
             <a:endParaRPr kumimoji="1" lang="ja-JP" altLang="en-US"/>
           </a:p>
@@ -1697,7 +1911,7 @@
           <a:p>
             <a:fld id="{646F7BC6-0DD9-432D-832E-B572781F5BB3}" type="datetimeFigureOut">
               <a:rPr kumimoji="1" lang="ja-JP" altLang="en-US" smtClean="0"/>
-              <a:t>2026/3/8</a:t>
+              <a:t>2026/3/13</a:t>
             </a:fld>
             <a:endParaRPr kumimoji="1" lang="ja-JP" altLang="en-US"/>
           </a:p>
@@ -2026,7 +2240,7 @@
           <a:p>
             <a:fld id="{646F7BC6-0DD9-432D-832E-B572781F5BB3}" type="datetimeFigureOut">
               <a:rPr kumimoji="1" lang="ja-JP" altLang="en-US" smtClean="0"/>
-              <a:t>2026/3/8</a:t>
+              <a:t>2026/3/13</a:t>
             </a:fld>
             <a:endParaRPr kumimoji="1" lang="ja-JP" altLang="en-US"/>
           </a:p>
@@ -2502,7 +2716,7 @@
           <a:p>
             <a:fld id="{646F7BC6-0DD9-432D-832E-B572781F5BB3}" type="datetimeFigureOut">
               <a:rPr kumimoji="1" lang="ja-JP" altLang="en-US" smtClean="0"/>
-              <a:t>2026/3/8</a:t>
+              <a:t>2026/3/13</a:t>
             </a:fld>
             <a:endParaRPr kumimoji="1" lang="ja-JP" altLang="en-US"/>
           </a:p>
@@ -2643,7 +2857,7 @@
           <a:p>
             <a:fld id="{646F7BC6-0DD9-432D-832E-B572781F5BB3}" type="datetimeFigureOut">
               <a:rPr kumimoji="1" lang="ja-JP" altLang="en-US" smtClean="0"/>
-              <a:t>2026/3/8</a:t>
+              <a:t>2026/3/13</a:t>
             </a:fld>
             <a:endParaRPr kumimoji="1" lang="ja-JP" altLang="en-US"/>
           </a:p>
@@ -2756,7 +2970,7 @@
           <a:p>
             <a:fld id="{646F7BC6-0DD9-432D-832E-B572781F5BB3}" type="datetimeFigureOut">
               <a:rPr kumimoji="1" lang="ja-JP" altLang="en-US" smtClean="0"/>
-              <a:t>2026/3/8</a:t>
+              <a:t>2026/3/13</a:t>
             </a:fld>
             <a:endParaRPr kumimoji="1" lang="ja-JP" altLang="en-US"/>
           </a:p>
@@ -3099,7 +3313,7 @@
           <a:p>
             <a:fld id="{646F7BC6-0DD9-432D-832E-B572781F5BB3}" type="datetimeFigureOut">
               <a:rPr kumimoji="1" lang="ja-JP" altLang="en-US" smtClean="0"/>
-              <a:t>2026/3/8</a:t>
+              <a:t>2026/3/13</a:t>
             </a:fld>
             <a:endParaRPr kumimoji="1" lang="ja-JP" altLang="en-US"/>
           </a:p>
@@ -3387,7 +3601,7 @@
           <a:p>
             <a:fld id="{646F7BC6-0DD9-432D-832E-B572781F5BB3}" type="datetimeFigureOut">
               <a:rPr kumimoji="1" lang="ja-JP" altLang="en-US" smtClean="0"/>
-              <a:t>2026/3/8</a:t>
+              <a:t>2026/3/13</a:t>
             </a:fld>
             <a:endParaRPr kumimoji="1" lang="ja-JP" altLang="en-US"/>
           </a:p>
@@ -3660,7 +3874,7 @@
           <a:p>
             <a:fld id="{646F7BC6-0DD9-432D-832E-B572781F5BB3}" type="datetimeFigureOut">
               <a:rPr kumimoji="1" lang="ja-JP" altLang="en-US" smtClean="0"/>
-              <a:t>2026/3/8</a:t>
+              <a:t>2026/3/13</a:t>
             </a:fld>
             <a:endParaRPr kumimoji="1" lang="ja-JP" altLang="en-US"/>
           </a:p>
@@ -4266,7 +4480,7 @@
           <a:noFill/>
         </p:spPr>
         <p:txBody>
-          <a:bodyPr wrap="none" rtlCol="0">
+          <a:bodyPr wrap="square" rtlCol="0">
             <a:spAutoFit/>
           </a:bodyPr>
           <a:lstStyle/>
@@ -4542,6 +4756,523 @@
     <p:extLst>
       <p:ext uri="{BB962C8B-B14F-4D97-AF65-F5344CB8AC3E}">
         <p14:creationId xmlns:p14="http://schemas.microsoft.com/office/powerpoint/2010/main" val="3698264915"/>
+      </p:ext>
+    </p:extLst>
+  </p:cSld>
+  <p:clrMapOvr>
+    <a:masterClrMapping/>
+  </p:clrMapOvr>
+</p:sld>
+</file>
+
+<file path=ppt/slides/slide2.xml><?xml version="1.0" encoding="utf-8"?>
+<p:sld xmlns:a="http://schemas.openxmlformats.org/drawingml/2006/main" xmlns:r="http://schemas.openxmlformats.org/officeDocument/2006/relationships" xmlns:p="http://schemas.openxmlformats.org/presentationml/2006/main">
+  <p:cSld>
+    <p:spTree>
+      <p:nvGrpSpPr>
+        <p:cNvPr id="1" name="">
+          <a:extLst>
+            <a:ext uri="{FF2B5EF4-FFF2-40B4-BE49-F238E27FC236}">
+              <a16:creationId xmlns:a16="http://schemas.microsoft.com/office/drawing/2014/main" id="{8F08CA86-0690-FA5C-0228-EFAD27F4B96C}"/>
+            </a:ext>
+          </a:extLst>
+        </p:cNvPr>
+        <p:cNvGrpSpPr/>
+        <p:nvPr/>
+      </p:nvGrpSpPr>
+      <p:grpSpPr>
+        <a:xfrm>
+          <a:off x="0" y="0"/>
+          <a:ext cx="0" cy="0"/>
+          <a:chOff x="0" y="0"/>
+          <a:chExt cx="0" cy="0"/>
+        </a:xfrm>
+      </p:grpSpPr>
+      <p:pic>
+        <p:nvPicPr>
+          <p:cNvPr id="5" name="図 4" descr="ゲームのキャラクター&#10;&#10;AI によって生成されたコンテンツは間違っている可能性があります。">
+            <a:extLst>
+              <a:ext uri="{FF2B5EF4-FFF2-40B4-BE49-F238E27FC236}">
+                <a16:creationId xmlns:a16="http://schemas.microsoft.com/office/drawing/2014/main" id="{FC12999B-C7B1-E16E-F0E9-B3C576092201}"/>
+              </a:ext>
+            </a:extLst>
+          </p:cNvPr>
+          <p:cNvPicPr>
+            <a:picLocks noChangeAspect="1"/>
+          </p:cNvPicPr>
+          <p:nvPr/>
+        </p:nvPicPr>
+        <p:blipFill>
+          <a:blip r:embed="rId3">
+            <a:extLst>
+              <a:ext uri="{28A0092B-C50C-407E-A947-70E740481C1C}">
+                <a14:useLocalDpi xmlns:a14="http://schemas.microsoft.com/office/drawing/2010/main" val="0"/>
+              </a:ext>
+            </a:extLst>
+          </a:blip>
+          <a:stretch>
+            <a:fillRect/>
+          </a:stretch>
+        </p:blipFill>
+        <p:spPr>
+          <a:xfrm>
+            <a:off x="942296" y="528637"/>
+            <a:ext cx="2019015" cy="1692049"/>
+          </a:xfrm>
+          <a:prstGeom prst="rect">
+            <a:avLst/>
+          </a:prstGeom>
+        </p:spPr>
+      </p:pic>
+      <p:pic>
+        <p:nvPicPr>
+          <p:cNvPr id="7" name="図 6" descr="光 が含まれている画像&#10;&#10;AI によって生成されたコンテンツは間違っている可能性があります。">
+            <a:extLst>
+              <a:ext uri="{FF2B5EF4-FFF2-40B4-BE49-F238E27FC236}">
+                <a16:creationId xmlns:a16="http://schemas.microsoft.com/office/drawing/2014/main" id="{A40A7729-4498-46B5-6B3A-A3826CBAC0B4}"/>
+              </a:ext>
+            </a:extLst>
+          </p:cNvPr>
+          <p:cNvPicPr>
+            <a:picLocks noChangeAspect="1"/>
+          </p:cNvPicPr>
+          <p:nvPr/>
+        </p:nvPicPr>
+        <p:blipFill>
+          <a:blip r:embed="rId4">
+            <a:extLst>
+              <a:ext uri="{28A0092B-C50C-407E-A947-70E740481C1C}">
+                <a14:useLocalDpi xmlns:a14="http://schemas.microsoft.com/office/drawing/2010/main" val="0"/>
+              </a:ext>
+            </a:extLst>
+          </a:blip>
+          <a:stretch>
+            <a:fillRect/>
+          </a:stretch>
+        </p:blipFill>
+        <p:spPr>
+          <a:xfrm>
+            <a:off x="1130712" y="2343149"/>
+            <a:ext cx="1642182" cy="1861457"/>
+          </a:xfrm>
+          <a:prstGeom prst="rect">
+            <a:avLst/>
+          </a:prstGeom>
+        </p:spPr>
+      </p:pic>
+      <p:pic>
+        <p:nvPicPr>
+          <p:cNvPr id="9" name="図 8" descr="光 が含まれている画像&#10;&#10;AI によって生成されたコンテンツは間違っている可能性があります。">
+            <a:extLst>
+              <a:ext uri="{FF2B5EF4-FFF2-40B4-BE49-F238E27FC236}">
+                <a16:creationId xmlns:a16="http://schemas.microsoft.com/office/drawing/2014/main" id="{CE4A5D56-7039-EDB2-1E43-62380C7C2D31}"/>
+              </a:ext>
+            </a:extLst>
+          </p:cNvPr>
+          <p:cNvPicPr>
+            <a:picLocks noChangeAspect="1"/>
+          </p:cNvPicPr>
+          <p:nvPr/>
+        </p:nvPicPr>
+        <p:blipFill>
+          <a:blip r:embed="rId5">
+            <a:extLst>
+              <a:ext uri="{28A0092B-C50C-407E-A947-70E740481C1C}">
+                <a14:useLocalDpi xmlns:a14="http://schemas.microsoft.com/office/drawing/2010/main" val="0"/>
+              </a:ext>
+            </a:extLst>
+          </a:blip>
+          <a:stretch>
+            <a:fillRect/>
+          </a:stretch>
+        </p:blipFill>
+        <p:spPr>
+          <a:xfrm>
+            <a:off x="1070320" y="4204606"/>
+            <a:ext cx="1762965" cy="2179864"/>
+          </a:xfrm>
+          <a:prstGeom prst="rect">
+            <a:avLst/>
+          </a:prstGeom>
+        </p:spPr>
+      </p:pic>
+      <p:sp>
+        <p:nvSpPr>
+          <p:cNvPr id="10" name="吹き出し: 円形 9">
+            <a:extLst>
+              <a:ext uri="{FF2B5EF4-FFF2-40B4-BE49-F238E27FC236}">
+                <a16:creationId xmlns:a16="http://schemas.microsoft.com/office/drawing/2014/main" id="{107EB8A6-CC62-9FE2-4E83-93CA0369ED54}"/>
+              </a:ext>
+            </a:extLst>
+          </p:cNvPr>
+          <p:cNvSpPr/>
+          <p:nvPr/>
+        </p:nvSpPr>
+        <p:spPr>
+          <a:xfrm>
+            <a:off x="783774" y="528637"/>
+            <a:ext cx="979714" cy="589870"/>
+          </a:xfrm>
+          <a:prstGeom prst="wedgeEllipseCallout">
+            <a:avLst>
+              <a:gd name="adj1" fmla="val -9166"/>
+              <a:gd name="adj2" fmla="val 58348"/>
+            </a:avLst>
+          </a:prstGeom>
+        </p:spPr>
+        <p:style>
+          <a:lnRef idx="2">
+            <a:schemeClr val="dk1"/>
+          </a:lnRef>
+          <a:fillRef idx="1">
+            <a:schemeClr val="lt1"/>
+          </a:fillRef>
+          <a:effectRef idx="0">
+            <a:schemeClr val="dk1"/>
+          </a:effectRef>
+          <a:fontRef idx="minor">
+            <a:schemeClr val="dk1"/>
+          </a:fontRef>
+        </p:style>
+        <p:txBody>
+          <a:bodyPr rtlCol="0" anchor="ctr"/>
+          <a:lstStyle/>
+          <a:p>
+            <a:pPr algn="ctr"/>
+            <a:r>
+              <a:rPr kumimoji="1" lang="en-US" altLang="ja-JP" dirty="0">
+                <a:latin typeface="ADLaM Display" panose="020F0502020204030204" pitchFamily="2" charset="0"/>
+                <a:ea typeface="ADLaM Display" panose="020F0502020204030204" pitchFamily="2" charset="0"/>
+                <a:cs typeface="ADLaM Display" panose="020F0502020204030204" pitchFamily="2" charset="0"/>
+              </a:rPr>
+              <a:t>ON</a:t>
+            </a:r>
+            <a:endParaRPr kumimoji="1" lang="ja-JP" altLang="en-US" dirty="0">
+              <a:latin typeface="ADLaM Display" panose="020F0502020204030204" pitchFamily="2" charset="0"/>
+              <a:cs typeface="ADLaM Display" panose="020F0502020204030204" pitchFamily="2" charset="0"/>
+            </a:endParaRPr>
+          </a:p>
+        </p:txBody>
+      </p:sp>
+      <p:sp>
+        <p:nvSpPr>
+          <p:cNvPr id="11" name="テキスト ボックス 10">
+            <a:extLst>
+              <a:ext uri="{FF2B5EF4-FFF2-40B4-BE49-F238E27FC236}">
+                <a16:creationId xmlns:a16="http://schemas.microsoft.com/office/drawing/2014/main" id="{58C5102E-DFF7-1D48-182A-8B255B53A437}"/>
+              </a:ext>
+            </a:extLst>
+          </p:cNvPr>
+          <p:cNvSpPr txBox="1"/>
+          <p:nvPr/>
+        </p:nvSpPr>
+        <p:spPr>
+          <a:xfrm>
+            <a:off x="3282707" y="1118507"/>
+            <a:ext cx="3262432" cy="830997"/>
+          </a:xfrm>
+          <a:prstGeom prst="rect">
+            <a:avLst/>
+          </a:prstGeom>
+          <a:noFill/>
+        </p:spPr>
+        <p:txBody>
+          <a:bodyPr wrap="square" rtlCol="0">
+            <a:spAutoFit/>
+          </a:bodyPr>
+          <a:lstStyle/>
+          <a:p>
+            <a:r>
+              <a:rPr lang="ja-JP" altLang="en-US" sz="2400" dirty="0"/>
+              <a:t>だれか スイッチを おした</a:t>
+            </a:r>
+            <a:endParaRPr kumimoji="1" lang="ja-JP" altLang="en-US" sz="2400" dirty="0"/>
+          </a:p>
+        </p:txBody>
+      </p:sp>
+      <p:sp>
+        <p:nvSpPr>
+          <p:cNvPr id="12" name="テキスト ボックス 11">
+            <a:extLst>
+              <a:ext uri="{FF2B5EF4-FFF2-40B4-BE49-F238E27FC236}">
+                <a16:creationId xmlns:a16="http://schemas.microsoft.com/office/drawing/2014/main" id="{F5269400-24F2-FF54-5FF9-F3898F9A9427}"/>
+              </a:ext>
+            </a:extLst>
+          </p:cNvPr>
+          <p:cNvSpPr txBox="1"/>
+          <p:nvPr/>
+        </p:nvSpPr>
+        <p:spPr>
+          <a:xfrm>
+            <a:off x="3282707" y="2858378"/>
+            <a:ext cx="3130985" cy="830997"/>
+          </a:xfrm>
+          <a:prstGeom prst="rect">
+            <a:avLst/>
+          </a:prstGeom>
+          <a:noFill/>
+        </p:spPr>
+        <p:txBody>
+          <a:bodyPr wrap="none" rtlCol="0">
+            <a:spAutoFit/>
+          </a:bodyPr>
+          <a:lstStyle/>
+          <a:p>
+            <a:r>
+              <a:rPr lang="ja-JP" altLang="en-US" sz="2400" dirty="0"/>
+              <a:t>かべの でんきゅうに </a:t>
+            </a:r>
+            <a:endParaRPr lang="en-US" altLang="ja-JP" sz="2400" dirty="0"/>
+          </a:p>
+          <a:p>
+            <a:r>
+              <a:rPr kumimoji="1" lang="ja-JP" altLang="en-US" sz="2400" dirty="0"/>
+              <a:t>でんきを ながす</a:t>
+            </a:r>
+          </a:p>
+        </p:txBody>
+      </p:sp>
+      <p:sp>
+        <p:nvSpPr>
+          <p:cNvPr id="13" name="テキスト ボックス 12">
+            <a:extLst>
+              <a:ext uri="{FF2B5EF4-FFF2-40B4-BE49-F238E27FC236}">
+                <a16:creationId xmlns:a16="http://schemas.microsoft.com/office/drawing/2014/main" id="{DC515835-AC3C-619C-C4E9-792AA76E6AE9}"/>
+              </a:ext>
+            </a:extLst>
+          </p:cNvPr>
+          <p:cNvSpPr txBox="1"/>
+          <p:nvPr/>
+        </p:nvSpPr>
+        <p:spPr>
+          <a:xfrm>
+            <a:off x="3590484" y="4980212"/>
+            <a:ext cx="2735044" cy="461665"/>
+          </a:xfrm>
+          <a:prstGeom prst="rect">
+            <a:avLst/>
+          </a:prstGeom>
+          <a:noFill/>
+        </p:spPr>
+        <p:txBody>
+          <a:bodyPr wrap="none" rtlCol="0">
+            <a:spAutoFit/>
+          </a:bodyPr>
+          <a:lstStyle/>
+          <a:p>
+            <a:r>
+              <a:rPr lang="ja-JP" altLang="en-US" sz="2400" dirty="0"/>
+              <a:t>あかりが ついた！</a:t>
+            </a:r>
+            <a:endParaRPr kumimoji="1" lang="ja-JP" altLang="en-US" sz="2400" dirty="0"/>
+          </a:p>
+        </p:txBody>
+      </p:sp>
+      <p:sp>
+        <p:nvSpPr>
+          <p:cNvPr id="14" name="テキスト ボックス 13">
+            <a:extLst>
+              <a:ext uri="{FF2B5EF4-FFF2-40B4-BE49-F238E27FC236}">
+                <a16:creationId xmlns:a16="http://schemas.microsoft.com/office/drawing/2014/main" id="{59E4B49D-F8C7-A240-877A-6186304D9969}"/>
+              </a:ext>
+            </a:extLst>
+          </p:cNvPr>
+          <p:cNvSpPr txBox="1"/>
+          <p:nvPr/>
+        </p:nvSpPr>
+        <p:spPr>
+          <a:xfrm>
+            <a:off x="7756738" y="1118506"/>
+            <a:ext cx="2735044" cy="461665"/>
+          </a:xfrm>
+          <a:prstGeom prst="rect">
+            <a:avLst/>
+          </a:prstGeom>
+          <a:noFill/>
+        </p:spPr>
+        <p:txBody>
+          <a:bodyPr wrap="none" rtlCol="0">
+            <a:spAutoFit/>
+          </a:bodyPr>
+          <a:lstStyle/>
+          <a:p>
+            <a:r>
+              <a:rPr lang="ja-JP" altLang="en-US" sz="2400" dirty="0"/>
+              <a:t>イベントが おきた</a:t>
+            </a:r>
+            <a:endParaRPr kumimoji="1" lang="ja-JP" altLang="en-US" sz="2400" dirty="0"/>
+          </a:p>
+        </p:txBody>
+      </p:sp>
+      <p:sp>
+        <p:nvSpPr>
+          <p:cNvPr id="15" name="テキスト ボックス 14">
+            <a:extLst>
+              <a:ext uri="{FF2B5EF4-FFF2-40B4-BE49-F238E27FC236}">
+                <a16:creationId xmlns:a16="http://schemas.microsoft.com/office/drawing/2014/main" id="{6026282E-2BB9-61AC-F561-2FBB1462C1FA}"/>
+              </a:ext>
+            </a:extLst>
+          </p:cNvPr>
+          <p:cNvSpPr txBox="1"/>
+          <p:nvPr/>
+        </p:nvSpPr>
+        <p:spPr>
+          <a:xfrm>
+            <a:off x="7250991" y="2862386"/>
+            <a:ext cx="3658374" cy="830997"/>
+          </a:xfrm>
+          <a:prstGeom prst="rect">
+            <a:avLst/>
+          </a:prstGeom>
+          <a:noFill/>
+        </p:spPr>
+        <p:txBody>
+          <a:bodyPr wrap="none" rtlCol="0">
+            <a:spAutoFit/>
+          </a:bodyPr>
+          <a:lstStyle/>
+          <a:p>
+            <a:pPr algn="ctr"/>
+            <a:r>
+              <a:rPr kumimoji="1" lang="ja-JP" altLang="en-US" sz="2400" dirty="0"/>
+              <a:t>オブジェクトを </a:t>
+            </a:r>
+            <a:r>
+              <a:rPr lang="ja-JP" altLang="en-US" sz="2400" dirty="0"/>
+              <a:t>えら</a:t>
+            </a:r>
+            <a:r>
+              <a:rPr kumimoji="1" lang="ja-JP" altLang="en-US" sz="2400" dirty="0"/>
+              <a:t>んで</a:t>
+            </a:r>
+            <a:endParaRPr kumimoji="1" lang="en-US" altLang="ja-JP" sz="2400" dirty="0"/>
+          </a:p>
+          <a:p>
+            <a:pPr algn="ctr"/>
+            <a:r>
+              <a:rPr lang="ja-JP" altLang="en-US" sz="2400" dirty="0"/>
+              <a:t>めいれいする</a:t>
+            </a:r>
+            <a:endParaRPr kumimoji="1" lang="ja-JP" altLang="en-US" sz="2400" dirty="0"/>
+          </a:p>
+        </p:txBody>
+      </p:sp>
+      <p:sp>
+        <p:nvSpPr>
+          <p:cNvPr id="16" name="テキスト ボックス 15">
+            <a:extLst>
+              <a:ext uri="{FF2B5EF4-FFF2-40B4-BE49-F238E27FC236}">
+                <a16:creationId xmlns:a16="http://schemas.microsoft.com/office/drawing/2014/main" id="{35BE5446-70B1-8E53-0444-176CA8C66623}"/>
+              </a:ext>
+            </a:extLst>
+          </p:cNvPr>
+          <p:cNvSpPr txBox="1"/>
+          <p:nvPr/>
+        </p:nvSpPr>
+        <p:spPr>
+          <a:xfrm>
+            <a:off x="7756738" y="4980211"/>
+            <a:ext cx="3042821" cy="461665"/>
+          </a:xfrm>
+          <a:prstGeom prst="rect">
+            <a:avLst/>
+          </a:prstGeom>
+          <a:noFill/>
+        </p:spPr>
+        <p:txBody>
+          <a:bodyPr wrap="none" rtlCol="0">
+            <a:spAutoFit/>
+          </a:bodyPr>
+          <a:lstStyle/>
+          <a:p>
+            <a:r>
+              <a:rPr kumimoji="1" lang="ja-JP" altLang="en-US" sz="2400" dirty="0"/>
+              <a:t>プログラムが </a:t>
+            </a:r>
+            <a:r>
+              <a:rPr lang="ja-JP" altLang="en-US" sz="2400" dirty="0"/>
+              <a:t>うごく</a:t>
+            </a:r>
+            <a:endParaRPr kumimoji="1" lang="ja-JP" altLang="en-US" sz="2400" dirty="0"/>
+          </a:p>
+        </p:txBody>
+      </p:sp>
+      <p:cxnSp>
+        <p:nvCxnSpPr>
+          <p:cNvPr id="18" name="直線コネクタ 17">
+            <a:extLst>
+              <a:ext uri="{FF2B5EF4-FFF2-40B4-BE49-F238E27FC236}">
+                <a16:creationId xmlns:a16="http://schemas.microsoft.com/office/drawing/2014/main" id="{C566CDFD-892D-0687-1B47-334653BC37F9}"/>
+              </a:ext>
+            </a:extLst>
+          </p:cNvPr>
+          <p:cNvCxnSpPr/>
+          <p:nvPr/>
+        </p:nvCxnSpPr>
+        <p:spPr>
+          <a:xfrm>
+            <a:off x="563336" y="2343149"/>
+            <a:ext cx="11103428" cy="0"/>
+          </a:xfrm>
+          <a:prstGeom prst="line">
+            <a:avLst/>
+          </a:prstGeom>
+        </p:spPr>
+        <p:style>
+          <a:lnRef idx="2">
+            <a:schemeClr val="accent1"/>
+          </a:lnRef>
+          <a:fillRef idx="0">
+            <a:schemeClr val="accent1"/>
+          </a:fillRef>
+          <a:effectRef idx="1">
+            <a:schemeClr val="accent1"/>
+          </a:effectRef>
+          <a:fontRef idx="minor">
+            <a:schemeClr val="tx1"/>
+          </a:fontRef>
+        </p:style>
+      </p:cxnSp>
+      <p:cxnSp>
+        <p:nvCxnSpPr>
+          <p:cNvPr id="19" name="直線コネクタ 18">
+            <a:extLst>
+              <a:ext uri="{FF2B5EF4-FFF2-40B4-BE49-F238E27FC236}">
+                <a16:creationId xmlns:a16="http://schemas.microsoft.com/office/drawing/2014/main" id="{6E28AEEC-35D0-529B-D069-C6094C1D8EF6}"/>
+              </a:ext>
+            </a:extLst>
+          </p:cNvPr>
+          <p:cNvCxnSpPr/>
+          <p:nvPr/>
+        </p:nvCxnSpPr>
+        <p:spPr>
+          <a:xfrm>
+            <a:off x="618042" y="4204606"/>
+            <a:ext cx="11103428" cy="0"/>
+          </a:xfrm>
+          <a:prstGeom prst="line">
+            <a:avLst/>
+          </a:prstGeom>
+        </p:spPr>
+        <p:style>
+          <a:lnRef idx="2">
+            <a:schemeClr val="accent1"/>
+          </a:lnRef>
+          <a:fillRef idx="0">
+            <a:schemeClr val="accent1"/>
+          </a:fillRef>
+          <a:effectRef idx="1">
+            <a:schemeClr val="accent1"/>
+          </a:effectRef>
+          <a:fontRef idx="minor">
+            <a:schemeClr val="tx1"/>
+          </a:fontRef>
+        </p:style>
+      </p:cxnSp>
+    </p:spTree>
+    <p:extLst>
+      <p:ext uri="{BB962C8B-B14F-4D97-AF65-F5344CB8AC3E}">
+        <p14:creationId xmlns:p14="http://schemas.microsoft.com/office/powerpoint/2010/main" val="360896339"/>
       </p:ext>
     </p:extLst>
   </p:cSld>
